--- a/ads/software-basico/aula06-estrutura-for-if/Aula_03_-_Laco_FOR_em_Fluxograma.pptx
+++ b/ads/software-basico/aula06-estrutura-for-if/Aula_03_-_Laco_FOR_em_Fluxograma.pptx
@@ -1417,7 +1417,7 @@
             <a:fld id="{F81AA659-8FD3-461F-8FBC-BDBF8F913D9D}" type="datetimeFigureOut">
               <a:rPr lang="pt-BR" smtClean="0"/>
               <a:pPr/>
-              <a:t>19/10/2026</a:t>
+              <a:t>26/10/2026</a:t>
             </a:fld>
             <a:endParaRPr lang="pt-BR"/>
           </a:p>
@@ -12772,7 +12772,7 @@
           </a:bodyPr>
           <a:lstStyle/>
           <a:p>
-            <a:pPr marL="0" indent="0" algn="l">
+            <a:pPr marL="0" indent="0" algn="just">
               <a:spcBef>
                 <a:spcPts val="0"/>
               </a:spcBef>
@@ -13131,7 +13131,7 @@
           </a:bodyPr>
           <a:lstStyle/>
           <a:p>
-            <a:pPr marL="0" indent="0" algn="l">
+            <a:pPr marL="0" indent="0" algn="just">
               <a:spcBef>
                 <a:spcPts val="0"/>
               </a:spcBef>
@@ -13362,7 +13362,7 @@
           </a:bodyPr>
           <a:lstStyle/>
           <a:p>
-            <a:pPr marL="0" indent="0" algn="l">
+            <a:pPr marL="0" indent="0" algn="just">
               <a:spcBef>
                 <a:spcPts val="0"/>
               </a:spcBef>
